--- a/content/2026-2/cea055-estatistica-probabilidade/19-intervalo-confianca-media/Aula_19_Intervalo_Confianca_Media.pptx
+++ b/content/2026-2/cea055-estatistica-probabilidade/19-intervalo-confianca-media/Aula_19_Intervalo_Confianca_Media.pptx
@@ -5955,7 +5955,7 @@
           <a:p>
             <a:r>
               <a:rPr lang="pt-BR" sz="1700" i="1" dirty="0"/>
-              <a:t>Esses valores vêm da tabela Normal padrão: procuramos a área α/2 na cauda superior, tal como fizemos nos testes com Z.</a:t>
+              <a:t>Esses valores vêm da tabela Normal padrão: procuramos a área α/2 na cauda superior, como já fazemos com a Normal padrão desde a Aula 13.</a:t>
             </a:r>
           </a:p>
           <a:p>

--- a/content/2026-2/cea055-estatistica-probabilidade/19-intervalo-confianca-media/Aula_19_Intervalo_Confianca_Media.pptx
+++ b/content/2026-2/cea055-estatistica-probabilidade/19-intervalo-confianca-media/Aula_19_Intervalo_Confianca_Media.pptx
@@ -3971,50 +3971,6 @@
       </p:grpSpPr>
       <p:sp>
         <p:nvSpPr>
-          <p:cNvPr id="2" name="Título 1"/>
-          <p:cNvSpPr>
-            <a:spLocks noGrp="1"/>
-          </p:cNvSpPr>
-          <p:nvPr>
-            <p:ph type="title"/>
-          </p:nvPr>
-        </p:nvSpPr>
-        <p:spPr>
-          <a:xfrm>
-            <a:off x="1032611" y="0"/>
-            <a:ext cx="10827959" cy="900000"/>
-          </a:xfrm>
-        </p:spPr>
-        <p:txBody>
-          <a:bodyPr>
-            <a:normAutofit/>
-          </a:bodyPr>
-          <a:lstStyle/>
-          <a:p>
-            <a:pPr algn="ctr"/>
-            <a:r>
-              <a:rPr lang="pt-BR" dirty="0">
-                <a:latin typeface="AlternateGothic2 BT" panose="020B0608020202050204" pitchFamily="34" charset="0"/>
-              </a:rPr>
-              <a:t>CEA055 – Estatística e Probabilidade</a:t>
-            </a:r>
-            <a:br>
-              <a:rPr lang="pt-BR" dirty="0">
-                <a:latin typeface="AlternateGothic2 BT" panose="020B0608020202050204" pitchFamily="34" charset="0"/>
-              </a:rPr>
-            </a:br>
-            <a:r>
-              <a:rPr lang="pt-BR" sz="1700" b="1" dirty="0"/>
-              <a:t>Intervalo de Confiança para a Média</a:t>
-            </a:r>
-            <a:endParaRPr lang="pt-BR" dirty="0">
-              <a:latin typeface="AlternateGothic2 BT" panose="020B0608020202050204" pitchFamily="34" charset="0"/>
-            </a:endParaRPr>
-          </a:p>
-        </p:txBody>
-      </p:sp>
-      <p:sp>
-        <p:nvSpPr>
           <p:cNvPr id="6" name="Caixa"/>
           <p:cNvSpPr txBox="1"/>
           <p:nvPr/>
@@ -4124,7 +4080,7 @@
         <p:spPr>
           <a:xfrm>
             <a:off x="361395" y="6488668"/>
-            <a:ext cx="2395336" cy="300210"/>
+            <a:ext cx="7620000" cy="300210"/>
           </a:xfrm>
           <a:prstGeom prst="rect">
             <a:avLst/>
@@ -4139,35 +4095,11 @@
           <a:p>
             <a:r>
               <a:rPr lang="pt-BR" sz="1351" dirty="0"/>
-              <a:t>Professor: Marcos Goulart Lima</a:t>
-            </a:r>
-          </a:p>
-        </p:txBody>
-      </p:sp>
-      <p:pic>
-        <p:nvPicPr>
-          <p:cNvPr id="8" name="Logo UFOP"/>
-          <p:cNvPicPr>
-            <a:picLocks noChangeAspect="1"/>
-          </p:cNvPicPr>
-          <p:nvPr/>
-        </p:nvPicPr>
-        <p:blipFill>
-          <a:blip r:embed="rId3"/>
-          <a:stretch>
-            <a:fillRect/>
-          </a:stretch>
-        </p:blipFill>
-        <p:spPr>
-          <a:xfrm>
-            <a:off x="62144" y="112237"/>
-            <a:ext cx="588096" cy="1228523"/>
-          </a:xfrm>
-          <a:prstGeom prst="rect">
-            <a:avLst/>
-          </a:prstGeom>
-        </p:spPr>
-      </p:pic>
+              <a:t>CEA055 - Estatística e Probabilidade - Professor: Marcos Goulart Lima</a:t>
+            </a:r>
+          </a:p>
+        </p:txBody>
+      </p:sp>
     </p:spTree>
   </p:cSld>
   <p:clrMapOvr>
@@ -4195,50 +4127,6 @@
       </p:grpSpPr>
       <p:sp>
         <p:nvSpPr>
-          <p:cNvPr id="2" name="Título 1"/>
-          <p:cNvSpPr>
-            <a:spLocks noGrp="1"/>
-          </p:cNvSpPr>
-          <p:nvPr>
-            <p:ph type="title"/>
-          </p:nvPr>
-        </p:nvSpPr>
-        <p:spPr>
-          <a:xfrm>
-            <a:off x="1032611" y="0"/>
-            <a:ext cx="10827959" cy="900000"/>
-          </a:xfrm>
-        </p:spPr>
-        <p:txBody>
-          <a:bodyPr>
-            <a:normAutofit/>
-          </a:bodyPr>
-          <a:lstStyle/>
-          <a:p>
-            <a:pPr algn="ctr"/>
-            <a:r>
-              <a:rPr lang="pt-BR" dirty="0">
-                <a:latin typeface="AlternateGothic2 BT" panose="020B0608020202050204" pitchFamily="34" charset="0"/>
-              </a:rPr>
-              <a:t>CEA055 – Estatística e Probabilidade</a:t>
-            </a:r>
-            <a:br>
-              <a:rPr lang="pt-BR" dirty="0">
-                <a:latin typeface="AlternateGothic2 BT" panose="020B0608020202050204" pitchFamily="34" charset="0"/>
-              </a:rPr>
-            </a:br>
-            <a:r>
-              <a:rPr lang="pt-BR" sz="1700" b="1" dirty="0"/>
-              <a:t>Intervalo de Confiança para a Média</a:t>
-            </a:r>
-            <a:endParaRPr lang="pt-BR" dirty="0">
-              <a:latin typeface="AlternateGothic2 BT" panose="020B0608020202050204" pitchFamily="34" charset="0"/>
-            </a:endParaRPr>
-          </a:p>
-        </p:txBody>
-      </p:sp>
-      <p:sp>
-        <p:nvSpPr>
           <p:cNvPr id="6" name="Caixa"/>
           <p:cNvSpPr txBox="1"/>
           <p:nvPr/>
@@ -4318,7 +4206,7 @@
         <p:spPr>
           <a:xfrm>
             <a:off x="361395" y="6488668"/>
-            <a:ext cx="2395336" cy="300210"/>
+            <a:ext cx="7620000" cy="300210"/>
           </a:xfrm>
           <a:prstGeom prst="rect">
             <a:avLst/>
@@ -4333,35 +4221,11 @@
           <a:p>
             <a:r>
               <a:rPr lang="pt-BR" sz="1351" dirty="0"/>
-              <a:t>Professor: Marcos Goulart Lima</a:t>
-            </a:r>
-          </a:p>
-        </p:txBody>
-      </p:sp>
-      <p:pic>
-        <p:nvPicPr>
-          <p:cNvPr id="8" name="Logo UFOP"/>
-          <p:cNvPicPr>
-            <a:picLocks noChangeAspect="1"/>
-          </p:cNvPicPr>
-          <p:nvPr/>
-        </p:nvPicPr>
-        <p:blipFill>
-          <a:blip r:embed="rId2"/>
-          <a:stretch>
-            <a:fillRect/>
-          </a:stretch>
-        </p:blipFill>
-        <p:spPr>
-          <a:xfrm>
-            <a:off x="62144" y="112237"/>
-            <a:ext cx="588096" cy="1228523"/>
-          </a:xfrm>
-          <a:prstGeom prst="rect">
-            <a:avLst/>
-          </a:prstGeom>
-        </p:spPr>
-      </p:pic>
+              <a:t>CEA055 - Estatística e Probabilidade - Professor: Marcos Goulart Lima</a:t>
+            </a:r>
+          </a:p>
+        </p:txBody>
+      </p:sp>
     </p:spTree>
   </p:cSld>
   <p:clrMapOvr>
@@ -4389,50 +4253,6 @@
       </p:grpSpPr>
       <p:sp>
         <p:nvSpPr>
-          <p:cNvPr id="2" name="Título 1"/>
-          <p:cNvSpPr>
-            <a:spLocks noGrp="1"/>
-          </p:cNvSpPr>
-          <p:nvPr>
-            <p:ph type="title"/>
-          </p:nvPr>
-        </p:nvSpPr>
-        <p:spPr>
-          <a:xfrm>
-            <a:off x="1032611" y="0"/>
-            <a:ext cx="10827959" cy="900000"/>
-          </a:xfrm>
-        </p:spPr>
-        <p:txBody>
-          <a:bodyPr>
-            <a:normAutofit/>
-          </a:bodyPr>
-          <a:lstStyle/>
-          <a:p>
-            <a:pPr algn="ctr"/>
-            <a:r>
-              <a:rPr lang="pt-BR" dirty="0">
-                <a:latin typeface="AlternateGothic2 BT" panose="020B0608020202050204" pitchFamily="34" charset="0"/>
-              </a:rPr>
-              <a:t>CEA055 – Estatística e Probabilidade</a:t>
-            </a:r>
-            <a:br>
-              <a:rPr lang="pt-BR" dirty="0">
-                <a:latin typeface="AlternateGothic2 BT" panose="020B0608020202050204" pitchFamily="34" charset="0"/>
-              </a:rPr>
-            </a:br>
-            <a:r>
-              <a:rPr lang="pt-BR" sz="1700" b="1" dirty="0"/>
-              <a:t>Intervalo de Confiança para a Média</a:t>
-            </a:r>
-            <a:endParaRPr lang="pt-BR" dirty="0">
-              <a:latin typeface="AlternateGothic2 BT" panose="020B0608020202050204" pitchFamily="34" charset="0"/>
-            </a:endParaRPr>
-          </a:p>
-        </p:txBody>
-      </p:sp>
-      <p:sp>
-        <p:nvSpPr>
           <p:cNvPr id="6" name="Caixa"/>
           <p:cNvSpPr txBox="1"/>
           <p:nvPr/>
@@ -4530,7 +4350,7 @@
         <p:spPr>
           <a:xfrm>
             <a:off x="361395" y="6488668"/>
-            <a:ext cx="2395336" cy="300210"/>
+            <a:ext cx="7620000" cy="300210"/>
           </a:xfrm>
           <a:prstGeom prst="rect">
             <a:avLst/>
@@ -4545,35 +4365,11 @@
           <a:p>
             <a:r>
               <a:rPr lang="pt-BR" sz="1351" dirty="0"/>
-              <a:t>Professor: Marcos Goulart Lima</a:t>
-            </a:r>
-          </a:p>
-        </p:txBody>
-      </p:sp>
-      <p:pic>
-        <p:nvPicPr>
-          <p:cNvPr id="8" name="Logo UFOP"/>
-          <p:cNvPicPr>
-            <a:picLocks noChangeAspect="1"/>
-          </p:cNvPicPr>
-          <p:nvPr/>
-        </p:nvPicPr>
-        <p:blipFill>
-          <a:blip r:embed="rId2"/>
-          <a:stretch>
-            <a:fillRect/>
-          </a:stretch>
-        </p:blipFill>
-        <p:spPr>
-          <a:xfrm>
-            <a:off x="62144" y="112237"/>
-            <a:ext cx="588096" cy="1228523"/>
-          </a:xfrm>
-          <a:prstGeom prst="rect">
-            <a:avLst/>
-          </a:prstGeom>
-        </p:spPr>
-      </p:pic>
+              <a:t>CEA055 - Estatística e Probabilidade - Professor: Marcos Goulart Lima</a:t>
+            </a:r>
+          </a:p>
+        </p:txBody>
+      </p:sp>
     </p:spTree>
   </p:cSld>
   <p:clrMapOvr>
@@ -4601,50 +4397,6 @@
       </p:grpSpPr>
       <p:sp>
         <p:nvSpPr>
-          <p:cNvPr id="2" name="Título 1"/>
-          <p:cNvSpPr>
-            <a:spLocks noGrp="1"/>
-          </p:cNvSpPr>
-          <p:nvPr>
-            <p:ph type="title"/>
-          </p:nvPr>
-        </p:nvSpPr>
-        <p:spPr>
-          <a:xfrm>
-            <a:off x="1032611" y="0"/>
-            <a:ext cx="10827959" cy="900000"/>
-          </a:xfrm>
-        </p:spPr>
-        <p:txBody>
-          <a:bodyPr>
-            <a:normAutofit/>
-          </a:bodyPr>
-          <a:lstStyle/>
-          <a:p>
-            <a:pPr algn="ctr"/>
-            <a:r>
-              <a:rPr lang="pt-BR" dirty="0">
-                <a:latin typeface="AlternateGothic2 BT" panose="020B0608020202050204" pitchFamily="34" charset="0"/>
-              </a:rPr>
-              <a:t>CEA055 – Estatística e Probabilidade</a:t>
-            </a:r>
-            <a:br>
-              <a:rPr lang="pt-BR" dirty="0">
-                <a:latin typeface="AlternateGothic2 BT" panose="020B0608020202050204" pitchFamily="34" charset="0"/>
-              </a:rPr>
-            </a:br>
-            <a:r>
-              <a:rPr lang="pt-BR" sz="1700" b="1" dirty="0"/>
-              <a:t>Intervalo de Confiança para a Média</a:t>
-            </a:r>
-            <a:endParaRPr lang="pt-BR" dirty="0">
-              <a:latin typeface="AlternateGothic2 BT" panose="020B0608020202050204" pitchFamily="34" charset="0"/>
-            </a:endParaRPr>
-          </a:p>
-        </p:txBody>
-      </p:sp>
-      <p:sp>
-        <p:nvSpPr>
           <p:cNvPr id="6" name="Caixa"/>
           <p:cNvSpPr txBox="1"/>
           <p:nvPr/>
@@ -4723,7 +4475,7 @@
         <p:spPr>
           <a:xfrm>
             <a:off x="361395" y="6488668"/>
-            <a:ext cx="2395336" cy="300210"/>
+            <a:ext cx="7620000" cy="300210"/>
           </a:xfrm>
           <a:prstGeom prst="rect">
             <a:avLst/>
@@ -4738,35 +4490,11 @@
           <a:p>
             <a:r>
               <a:rPr lang="pt-BR" sz="1351" dirty="0"/>
-              <a:t>Professor: Marcos Goulart Lima</a:t>
-            </a:r>
-          </a:p>
-        </p:txBody>
-      </p:sp>
-      <p:pic>
-        <p:nvPicPr>
-          <p:cNvPr id="8" name="Logo UFOP"/>
-          <p:cNvPicPr>
-            <a:picLocks noChangeAspect="1"/>
-          </p:cNvPicPr>
-          <p:nvPr/>
-        </p:nvPicPr>
-        <p:blipFill>
-          <a:blip r:embed="rId2"/>
-          <a:stretch>
-            <a:fillRect/>
-          </a:stretch>
-        </p:blipFill>
-        <p:spPr>
-          <a:xfrm>
-            <a:off x="62144" y="112237"/>
-            <a:ext cx="588096" cy="1228523"/>
-          </a:xfrm>
-          <a:prstGeom prst="rect">
-            <a:avLst/>
-          </a:prstGeom>
-        </p:spPr>
-      </p:pic>
+              <a:t>CEA055 - Estatística e Probabilidade - Professor: Marcos Goulart Lima</a:t>
+            </a:r>
+          </a:p>
+        </p:txBody>
+      </p:sp>
     </p:spTree>
   </p:cSld>
   <p:clrMapOvr>
@@ -4794,50 +4522,6 @@
       </p:grpSpPr>
       <p:sp>
         <p:nvSpPr>
-          <p:cNvPr id="2" name="Título 1"/>
-          <p:cNvSpPr>
-            <a:spLocks noGrp="1"/>
-          </p:cNvSpPr>
-          <p:nvPr>
-            <p:ph type="title"/>
-          </p:nvPr>
-        </p:nvSpPr>
-        <p:spPr>
-          <a:xfrm>
-            <a:off x="1032611" y="0"/>
-            <a:ext cx="10827959" cy="900000"/>
-          </a:xfrm>
-        </p:spPr>
-        <p:txBody>
-          <a:bodyPr>
-            <a:normAutofit/>
-          </a:bodyPr>
-          <a:lstStyle/>
-          <a:p>
-            <a:pPr algn="ctr"/>
-            <a:r>
-              <a:rPr lang="pt-BR" dirty="0">
-                <a:latin typeface="AlternateGothic2 BT" panose="020B0608020202050204" pitchFamily="34" charset="0"/>
-              </a:rPr>
-              <a:t>CEA055 – Estatística e Probabilidade</a:t>
-            </a:r>
-            <a:br>
-              <a:rPr lang="pt-BR" dirty="0">
-                <a:latin typeface="AlternateGothic2 BT" panose="020B0608020202050204" pitchFamily="34" charset="0"/>
-              </a:rPr>
-            </a:br>
-            <a:r>
-              <a:rPr lang="pt-BR" sz="1700" b="1" dirty="0"/>
-              <a:t>Intervalo de Confiança para a Média</a:t>
-            </a:r>
-            <a:endParaRPr lang="pt-BR" dirty="0">
-              <a:latin typeface="AlternateGothic2 BT" panose="020B0608020202050204" pitchFamily="34" charset="0"/>
-            </a:endParaRPr>
-          </a:p>
-        </p:txBody>
-      </p:sp>
-      <p:sp>
-        <p:nvSpPr>
           <p:cNvPr id="6" name="Caixa"/>
           <p:cNvSpPr txBox="1"/>
           <p:nvPr/>
@@ -4916,7 +4600,7 @@
         <p:spPr>
           <a:xfrm>
             <a:off x="361395" y="6488668"/>
-            <a:ext cx="2395336" cy="300210"/>
+            <a:ext cx="7620000" cy="300210"/>
           </a:xfrm>
           <a:prstGeom prst="rect">
             <a:avLst/>
@@ -4931,35 +4615,11 @@
           <a:p>
             <a:r>
               <a:rPr lang="pt-BR" sz="1351" dirty="0"/>
-              <a:t>Professor: Marcos Goulart Lima</a:t>
-            </a:r>
-          </a:p>
-        </p:txBody>
-      </p:sp>
-      <p:pic>
-        <p:nvPicPr>
-          <p:cNvPr id="8" name="Logo UFOP"/>
-          <p:cNvPicPr>
-            <a:picLocks noChangeAspect="1"/>
-          </p:cNvPicPr>
-          <p:nvPr/>
-        </p:nvPicPr>
-        <p:blipFill>
-          <a:blip r:embed="rId2"/>
-          <a:stretch>
-            <a:fillRect/>
-          </a:stretch>
-        </p:blipFill>
-        <p:spPr>
-          <a:xfrm>
-            <a:off x="62144" y="112237"/>
-            <a:ext cx="588096" cy="1228523"/>
-          </a:xfrm>
-          <a:prstGeom prst="rect">
-            <a:avLst/>
-          </a:prstGeom>
-        </p:spPr>
-      </p:pic>
+              <a:t>CEA055 - Estatística e Probabilidade - Professor: Marcos Goulart Lima</a:t>
+            </a:r>
+          </a:p>
+        </p:txBody>
+      </p:sp>
     </p:spTree>
   </p:cSld>
   <p:clrMapOvr>
@@ -4987,50 +4647,6 @@
       </p:grpSpPr>
       <p:sp>
         <p:nvSpPr>
-          <p:cNvPr id="2" name="Título 1"/>
-          <p:cNvSpPr>
-            <a:spLocks noGrp="1"/>
-          </p:cNvSpPr>
-          <p:nvPr>
-            <p:ph type="title"/>
-          </p:nvPr>
-        </p:nvSpPr>
-        <p:spPr>
-          <a:xfrm>
-            <a:off x="1032611" y="0"/>
-            <a:ext cx="10827959" cy="900000"/>
-          </a:xfrm>
-        </p:spPr>
-        <p:txBody>
-          <a:bodyPr>
-            <a:normAutofit/>
-          </a:bodyPr>
-          <a:lstStyle/>
-          <a:p>
-            <a:pPr algn="ctr"/>
-            <a:r>
-              <a:rPr lang="pt-BR" dirty="0">
-                <a:latin typeface="AlternateGothic2 BT" panose="020B0608020202050204" pitchFamily="34" charset="0"/>
-              </a:rPr>
-              <a:t>CEA055 – Estatística e Probabilidade</a:t>
-            </a:r>
-            <a:br>
-              <a:rPr lang="pt-BR" dirty="0">
-                <a:latin typeface="AlternateGothic2 BT" panose="020B0608020202050204" pitchFamily="34" charset="0"/>
-              </a:rPr>
-            </a:br>
-            <a:r>
-              <a:rPr lang="pt-BR" sz="1700" b="1" dirty="0"/>
-              <a:t>Intervalo de Confiança para a Média</a:t>
-            </a:r>
-            <a:endParaRPr lang="pt-BR" dirty="0">
-              <a:latin typeface="AlternateGothic2 BT" panose="020B0608020202050204" pitchFamily="34" charset="0"/>
-            </a:endParaRPr>
-          </a:p>
-        </p:txBody>
-      </p:sp>
-      <p:sp>
-        <p:nvSpPr>
           <p:cNvPr id="6" name="Caixa"/>
           <p:cNvSpPr txBox="1"/>
           <p:nvPr/>
@@ -5145,7 +4761,7 @@
         <p:spPr>
           <a:xfrm>
             <a:off x="361395" y="6488668"/>
-            <a:ext cx="2395336" cy="300210"/>
+            <a:ext cx="7620000" cy="300210"/>
           </a:xfrm>
           <a:prstGeom prst="rect">
             <a:avLst/>
@@ -5160,35 +4776,11 @@
           <a:p>
             <a:r>
               <a:rPr lang="pt-BR" sz="1351" dirty="0"/>
-              <a:t>Professor: Marcos Goulart Lima</a:t>
-            </a:r>
-          </a:p>
-        </p:txBody>
-      </p:sp>
-      <p:pic>
-        <p:nvPicPr>
-          <p:cNvPr id="8" name="Logo UFOP"/>
-          <p:cNvPicPr>
-            <a:picLocks noChangeAspect="1"/>
-          </p:cNvPicPr>
-          <p:nvPr/>
-        </p:nvPicPr>
-        <p:blipFill>
-          <a:blip r:embed="rId2"/>
-          <a:stretch>
-            <a:fillRect/>
-          </a:stretch>
-        </p:blipFill>
-        <p:spPr>
-          <a:xfrm>
-            <a:off x="62144" y="112237"/>
-            <a:ext cx="588096" cy="1228523"/>
-          </a:xfrm>
-          <a:prstGeom prst="rect">
-            <a:avLst/>
-          </a:prstGeom>
-        </p:spPr>
-      </p:pic>
+              <a:t>CEA055 - Estatística e Probabilidade - Professor: Marcos Goulart Lima</a:t>
+            </a:r>
+          </a:p>
+        </p:txBody>
+      </p:sp>
     </p:spTree>
   </p:cSld>
   <p:clrMapOvr>
@@ -5216,50 +4808,6 @@
       </p:grpSpPr>
       <p:sp>
         <p:nvSpPr>
-          <p:cNvPr id="2" name="Título 1"/>
-          <p:cNvSpPr>
-            <a:spLocks noGrp="1"/>
-          </p:cNvSpPr>
-          <p:nvPr>
-            <p:ph type="title"/>
-          </p:nvPr>
-        </p:nvSpPr>
-        <p:spPr>
-          <a:xfrm>
-            <a:off x="1032611" y="0"/>
-            <a:ext cx="10827959" cy="900000"/>
-          </a:xfrm>
-        </p:spPr>
-        <p:txBody>
-          <a:bodyPr>
-            <a:normAutofit/>
-          </a:bodyPr>
-          <a:lstStyle/>
-          <a:p>
-            <a:pPr algn="ctr"/>
-            <a:r>
-              <a:rPr lang="pt-BR" dirty="0">
-                <a:latin typeface="AlternateGothic2 BT" panose="020B0608020202050204" pitchFamily="34" charset="0"/>
-              </a:rPr>
-              <a:t>CEA055 – Estatística e Probabilidade</a:t>
-            </a:r>
-            <a:br>
-              <a:rPr lang="pt-BR" dirty="0">
-                <a:latin typeface="AlternateGothic2 BT" panose="020B0608020202050204" pitchFamily="34" charset="0"/>
-              </a:rPr>
-            </a:br>
-            <a:r>
-              <a:rPr lang="pt-BR" sz="1700" b="1" dirty="0"/>
-              <a:t>Intervalo de Confiança para a Média</a:t>
-            </a:r>
-            <a:endParaRPr lang="pt-BR" dirty="0">
-              <a:latin typeface="AlternateGothic2 BT" panose="020B0608020202050204" pitchFamily="34" charset="0"/>
-            </a:endParaRPr>
-          </a:p>
-        </p:txBody>
-      </p:sp>
-      <p:sp>
-        <p:nvSpPr>
           <p:cNvPr id="6" name="Caixa"/>
           <p:cNvSpPr txBox="1"/>
           <p:nvPr/>
@@ -5328,7 +4876,7 @@
         <p:spPr>
           <a:xfrm>
             <a:off x="361395" y="6488668"/>
-            <a:ext cx="2395336" cy="300210"/>
+            <a:ext cx="7620000" cy="300210"/>
           </a:xfrm>
           <a:prstGeom prst="rect">
             <a:avLst/>
@@ -5343,35 +4891,11 @@
           <a:p>
             <a:r>
               <a:rPr lang="pt-BR" sz="1351" dirty="0"/>
-              <a:t>Professor: Marcos Goulart Lima</a:t>
-            </a:r>
-          </a:p>
-        </p:txBody>
-      </p:sp>
-      <p:pic>
-        <p:nvPicPr>
-          <p:cNvPr id="8" name="Logo UFOP"/>
-          <p:cNvPicPr>
-            <a:picLocks noChangeAspect="1"/>
-          </p:cNvPicPr>
-          <p:nvPr/>
-        </p:nvPicPr>
-        <p:blipFill>
-          <a:blip r:embed="rId2"/>
-          <a:stretch>
-            <a:fillRect/>
-          </a:stretch>
-        </p:blipFill>
-        <p:spPr>
-          <a:xfrm>
-            <a:off x="62144" y="112237"/>
-            <a:ext cx="588096" cy="1228523"/>
-          </a:xfrm>
-          <a:prstGeom prst="rect">
-            <a:avLst/>
-          </a:prstGeom>
-        </p:spPr>
-      </p:pic>
+              <a:t>CEA055 - Estatística e Probabilidade - Professor: Marcos Goulart Lima</a:t>
+            </a:r>
+          </a:p>
+        </p:txBody>
+      </p:sp>
     </p:spTree>
   </p:cSld>
   <p:clrMapOvr>
@@ -5399,50 +4923,6 @@
       </p:grpSpPr>
       <p:sp>
         <p:nvSpPr>
-          <p:cNvPr id="2" name="Título 1"/>
-          <p:cNvSpPr>
-            <a:spLocks noGrp="1"/>
-          </p:cNvSpPr>
-          <p:nvPr>
-            <p:ph type="title"/>
-          </p:nvPr>
-        </p:nvSpPr>
-        <p:spPr>
-          <a:xfrm>
-            <a:off x="1032611" y="0"/>
-            <a:ext cx="10827959" cy="900000"/>
-          </a:xfrm>
-        </p:spPr>
-        <p:txBody>
-          <a:bodyPr>
-            <a:normAutofit/>
-          </a:bodyPr>
-          <a:lstStyle/>
-          <a:p>
-            <a:pPr algn="ctr"/>
-            <a:r>
-              <a:rPr lang="pt-BR" dirty="0">
-                <a:latin typeface="AlternateGothic2 BT" panose="020B0608020202050204" pitchFamily="34" charset="0"/>
-              </a:rPr>
-              <a:t>CEA055 – Estatística e Probabilidade</a:t>
-            </a:r>
-            <a:br>
-              <a:rPr lang="pt-BR" dirty="0">
-                <a:latin typeface="AlternateGothic2 BT" panose="020B0608020202050204" pitchFamily="34" charset="0"/>
-              </a:rPr>
-            </a:br>
-            <a:r>
-              <a:rPr lang="pt-BR" sz="1700" b="1" dirty="0"/>
-              <a:t>Intervalo de Confiança para a Média</a:t>
-            </a:r>
-            <a:endParaRPr lang="pt-BR" dirty="0">
-              <a:latin typeface="AlternateGothic2 BT" panose="020B0608020202050204" pitchFamily="34" charset="0"/>
-            </a:endParaRPr>
-          </a:p>
-        </p:txBody>
-      </p:sp>
-      <p:sp>
-        <p:nvSpPr>
           <p:cNvPr id="6" name="Caixa"/>
           <p:cNvSpPr txBox="1"/>
           <p:nvPr/>
@@ -5552,7 +5032,7 @@
         <p:spPr>
           <a:xfrm>
             <a:off x="361395" y="6488668"/>
-            <a:ext cx="2395336" cy="300210"/>
+            <a:ext cx="7620000" cy="300210"/>
           </a:xfrm>
           <a:prstGeom prst="rect">
             <a:avLst/>
@@ -5567,35 +5047,11 @@
           <a:p>
             <a:r>
               <a:rPr lang="pt-BR" sz="1351" dirty="0"/>
-              <a:t>Professor: Marcos Goulart Lima</a:t>
-            </a:r>
-          </a:p>
-        </p:txBody>
-      </p:sp>
-      <p:pic>
-        <p:nvPicPr>
-          <p:cNvPr id="8" name="Logo UFOP"/>
-          <p:cNvPicPr>
-            <a:picLocks noChangeAspect="1"/>
-          </p:cNvPicPr>
-          <p:nvPr/>
-        </p:nvPicPr>
-        <p:blipFill>
-          <a:blip r:embed="rId3"/>
-          <a:stretch>
-            <a:fillRect/>
-          </a:stretch>
-        </p:blipFill>
-        <p:spPr>
-          <a:xfrm>
-            <a:off x="62144" y="112237"/>
-            <a:ext cx="588096" cy="1228523"/>
-          </a:xfrm>
-          <a:prstGeom prst="rect">
-            <a:avLst/>
-          </a:prstGeom>
-        </p:spPr>
-      </p:pic>
+              <a:t>CEA055 - Estatística e Probabilidade - Professor: Marcos Goulart Lima</a:t>
+            </a:r>
+          </a:p>
+        </p:txBody>
+      </p:sp>
     </p:spTree>
   </p:cSld>
   <p:clrMapOvr>
@@ -5623,50 +5079,6 @@
       </p:grpSpPr>
       <p:sp>
         <p:nvSpPr>
-          <p:cNvPr id="2" name="Título 1"/>
-          <p:cNvSpPr>
-            <a:spLocks noGrp="1"/>
-          </p:cNvSpPr>
-          <p:nvPr>
-            <p:ph type="title"/>
-          </p:nvPr>
-        </p:nvSpPr>
-        <p:spPr>
-          <a:xfrm>
-            <a:off x="1032611" y="0"/>
-            <a:ext cx="10827959" cy="900000"/>
-          </a:xfrm>
-        </p:spPr>
-        <p:txBody>
-          <a:bodyPr>
-            <a:normAutofit/>
-          </a:bodyPr>
-          <a:lstStyle/>
-          <a:p>
-            <a:pPr algn="ctr"/>
-            <a:r>
-              <a:rPr lang="pt-BR" dirty="0">
-                <a:latin typeface="AlternateGothic2 BT" panose="020B0608020202050204" pitchFamily="34" charset="0"/>
-              </a:rPr>
-              <a:t>CEA055 – Estatística e Probabilidade</a:t>
-            </a:r>
-            <a:br>
-              <a:rPr lang="pt-BR" dirty="0">
-                <a:latin typeface="AlternateGothic2 BT" panose="020B0608020202050204" pitchFamily="34" charset="0"/>
-              </a:rPr>
-            </a:br>
-            <a:r>
-              <a:rPr lang="pt-BR" sz="1700" b="1" dirty="0"/>
-              <a:t>Intervalo de Confiança para a Média</a:t>
-            </a:r>
-            <a:endParaRPr lang="pt-BR" dirty="0">
-              <a:latin typeface="AlternateGothic2 BT" panose="020B0608020202050204" pitchFamily="34" charset="0"/>
-            </a:endParaRPr>
-          </a:p>
-        </p:txBody>
-      </p:sp>
-      <p:sp>
-        <p:nvSpPr>
           <p:cNvPr id="6" name="Caixa"/>
           <p:cNvSpPr txBox="1"/>
           <p:nvPr/>
@@ -5776,7 +5188,7 @@
         <p:spPr>
           <a:xfrm>
             <a:off x="361395" y="6488668"/>
-            <a:ext cx="2395336" cy="300210"/>
+            <a:ext cx="7620000" cy="300210"/>
           </a:xfrm>
           <a:prstGeom prst="rect">
             <a:avLst/>
@@ -5791,35 +5203,11 @@
           <a:p>
             <a:r>
               <a:rPr lang="pt-BR" sz="1351" dirty="0"/>
-              <a:t>Professor: Marcos Goulart Lima</a:t>
-            </a:r>
-          </a:p>
-        </p:txBody>
-      </p:sp>
-      <p:pic>
-        <p:nvPicPr>
-          <p:cNvPr id="8" name="Logo UFOP"/>
-          <p:cNvPicPr>
-            <a:picLocks noChangeAspect="1"/>
-          </p:cNvPicPr>
-          <p:nvPr/>
-        </p:nvPicPr>
-        <p:blipFill>
-          <a:blip r:embed="rId3"/>
-          <a:stretch>
-            <a:fillRect/>
-          </a:stretch>
-        </p:blipFill>
-        <p:spPr>
-          <a:xfrm>
-            <a:off x="62144" y="112237"/>
-            <a:ext cx="588096" cy="1228523"/>
-          </a:xfrm>
-          <a:prstGeom prst="rect">
-            <a:avLst/>
-          </a:prstGeom>
-        </p:spPr>
-      </p:pic>
+              <a:t>CEA055 - Estatística e Probabilidade - Professor: Marcos Goulart Lima</a:t>
+            </a:r>
+          </a:p>
+        </p:txBody>
+      </p:sp>
     </p:spTree>
   </p:cSld>
   <p:clrMapOvr>
@@ -5847,50 +5235,6 @@
       </p:grpSpPr>
       <p:sp>
         <p:nvSpPr>
-          <p:cNvPr id="2" name="Título 1"/>
-          <p:cNvSpPr>
-            <a:spLocks noGrp="1"/>
-          </p:cNvSpPr>
-          <p:nvPr>
-            <p:ph type="title"/>
-          </p:nvPr>
-        </p:nvSpPr>
-        <p:spPr>
-          <a:xfrm>
-            <a:off x="1032611" y="0"/>
-            <a:ext cx="10827959" cy="900000"/>
-          </a:xfrm>
-        </p:spPr>
-        <p:txBody>
-          <a:bodyPr>
-            <a:normAutofit/>
-          </a:bodyPr>
-          <a:lstStyle/>
-          <a:p>
-            <a:pPr algn="ctr"/>
-            <a:r>
-              <a:rPr lang="pt-BR" dirty="0">
-                <a:latin typeface="AlternateGothic2 BT" panose="020B0608020202050204" pitchFamily="34" charset="0"/>
-              </a:rPr>
-              <a:t>CEA055 – Estatística e Probabilidade</a:t>
-            </a:r>
-            <a:br>
-              <a:rPr lang="pt-BR" dirty="0">
-                <a:latin typeface="AlternateGothic2 BT" panose="020B0608020202050204" pitchFamily="34" charset="0"/>
-              </a:rPr>
-            </a:br>
-            <a:r>
-              <a:rPr lang="pt-BR" sz="1700" b="1" dirty="0"/>
-              <a:t>Intervalo de Confiança para a Média</a:t>
-            </a:r>
-            <a:endParaRPr lang="pt-BR" dirty="0">
-              <a:latin typeface="AlternateGothic2 BT" panose="020B0608020202050204" pitchFamily="34" charset="0"/>
-            </a:endParaRPr>
-          </a:p>
-        </p:txBody>
-      </p:sp>
-      <p:sp>
-        <p:nvSpPr>
           <p:cNvPr id="6" name="Caixa"/>
           <p:cNvSpPr txBox="1"/>
           <p:nvPr/>
@@ -5975,7 +5319,7 @@
         <p:spPr>
           <a:xfrm>
             <a:off x="361395" y="6488668"/>
-            <a:ext cx="2395336" cy="300210"/>
+            <a:ext cx="7620000" cy="300210"/>
           </a:xfrm>
           <a:prstGeom prst="rect">
             <a:avLst/>
@@ -5990,35 +5334,11 @@
           <a:p>
             <a:r>
               <a:rPr lang="pt-BR" sz="1351" dirty="0"/>
-              <a:t>Professor: Marcos Goulart Lima</a:t>
-            </a:r>
-          </a:p>
-        </p:txBody>
-      </p:sp>
-      <p:pic>
-        <p:nvPicPr>
-          <p:cNvPr id="8" name="Logo UFOP"/>
-          <p:cNvPicPr>
-            <a:picLocks noChangeAspect="1"/>
-          </p:cNvPicPr>
-          <p:nvPr/>
-        </p:nvPicPr>
-        <p:blipFill>
-          <a:blip r:embed="rId2"/>
-          <a:stretch>
-            <a:fillRect/>
-          </a:stretch>
-        </p:blipFill>
-        <p:spPr>
-          <a:xfrm>
-            <a:off x="62144" y="112237"/>
-            <a:ext cx="588096" cy="1228523"/>
-          </a:xfrm>
-          <a:prstGeom prst="rect">
-            <a:avLst/>
-          </a:prstGeom>
-        </p:spPr>
-      </p:pic>
+              <a:t>CEA055 - Estatística e Probabilidade - Professor: Marcos Goulart Lima</a:t>
+            </a:r>
+          </a:p>
+        </p:txBody>
+      </p:sp>
     </p:spTree>
   </p:cSld>
   <p:clrMapOvr>
@@ -6046,50 +5366,6 @@
       </p:grpSpPr>
       <p:sp>
         <p:nvSpPr>
-          <p:cNvPr id="2" name="Título 1"/>
-          <p:cNvSpPr>
-            <a:spLocks noGrp="1"/>
-          </p:cNvSpPr>
-          <p:nvPr>
-            <p:ph type="title"/>
-          </p:nvPr>
-        </p:nvSpPr>
-        <p:spPr>
-          <a:xfrm>
-            <a:off x="1032611" y="0"/>
-            <a:ext cx="10827959" cy="900000"/>
-          </a:xfrm>
-        </p:spPr>
-        <p:txBody>
-          <a:bodyPr>
-            <a:normAutofit/>
-          </a:bodyPr>
-          <a:lstStyle/>
-          <a:p>
-            <a:pPr algn="ctr"/>
-            <a:r>
-              <a:rPr lang="pt-BR" dirty="0">
-                <a:latin typeface="AlternateGothic2 BT" panose="020B0608020202050204" pitchFamily="34" charset="0"/>
-              </a:rPr>
-              <a:t>CEA055 – Estatística e Probabilidade</a:t>
-            </a:r>
-            <a:br>
-              <a:rPr lang="pt-BR" dirty="0">
-                <a:latin typeface="AlternateGothic2 BT" panose="020B0608020202050204" pitchFamily="34" charset="0"/>
-              </a:rPr>
-            </a:br>
-            <a:r>
-              <a:rPr lang="pt-BR" sz="1700" b="1" dirty="0"/>
-              <a:t>Intervalo de Confiança para a Média</a:t>
-            </a:r>
-            <a:endParaRPr lang="pt-BR" dirty="0">
-              <a:latin typeface="AlternateGothic2 BT" panose="020B0608020202050204" pitchFamily="34" charset="0"/>
-            </a:endParaRPr>
-          </a:p>
-        </p:txBody>
-      </p:sp>
-      <p:sp>
-        <p:nvSpPr>
           <p:cNvPr id="6" name="Caixa"/>
           <p:cNvSpPr txBox="1"/>
           <p:nvPr/>
@@ -6187,7 +5463,7 @@
         <p:spPr>
           <a:xfrm>
             <a:off x="361395" y="6488668"/>
-            <a:ext cx="2395336" cy="300210"/>
+            <a:ext cx="7620000" cy="300210"/>
           </a:xfrm>
           <a:prstGeom prst="rect">
             <a:avLst/>
@@ -6202,35 +5478,11 @@
           <a:p>
             <a:r>
               <a:rPr lang="pt-BR" sz="1351" dirty="0"/>
-              <a:t>Professor: Marcos Goulart Lima</a:t>
-            </a:r>
-          </a:p>
-        </p:txBody>
-      </p:sp>
-      <p:pic>
-        <p:nvPicPr>
-          <p:cNvPr id="8" name="Logo UFOP"/>
-          <p:cNvPicPr>
-            <a:picLocks noChangeAspect="1"/>
-          </p:cNvPicPr>
-          <p:nvPr/>
-        </p:nvPicPr>
-        <p:blipFill>
-          <a:blip r:embed="rId2"/>
-          <a:stretch>
-            <a:fillRect/>
-          </a:stretch>
-        </p:blipFill>
-        <p:spPr>
-          <a:xfrm>
-            <a:off x="62144" y="112237"/>
-            <a:ext cx="588096" cy="1228523"/>
-          </a:xfrm>
-          <a:prstGeom prst="rect">
-            <a:avLst/>
-          </a:prstGeom>
-        </p:spPr>
-      </p:pic>
+              <a:t>CEA055 - Estatística e Probabilidade - Professor: Marcos Goulart Lima</a:t>
+            </a:r>
+          </a:p>
+        </p:txBody>
+      </p:sp>
     </p:spTree>
   </p:cSld>
   <p:clrMapOvr>
@@ -6258,50 +5510,6 @@
       </p:grpSpPr>
       <p:sp>
         <p:nvSpPr>
-          <p:cNvPr id="2" name="Título 1"/>
-          <p:cNvSpPr>
-            <a:spLocks noGrp="1"/>
-          </p:cNvSpPr>
-          <p:nvPr>
-            <p:ph type="title"/>
-          </p:nvPr>
-        </p:nvSpPr>
-        <p:spPr>
-          <a:xfrm>
-            <a:off x="1032611" y="0"/>
-            <a:ext cx="10827959" cy="900000"/>
-          </a:xfrm>
-        </p:spPr>
-        <p:txBody>
-          <a:bodyPr>
-            <a:normAutofit/>
-          </a:bodyPr>
-          <a:lstStyle/>
-          <a:p>
-            <a:pPr algn="ctr"/>
-            <a:r>
-              <a:rPr lang="pt-BR" dirty="0">
-                <a:latin typeface="AlternateGothic2 BT" panose="020B0608020202050204" pitchFamily="34" charset="0"/>
-              </a:rPr>
-              <a:t>CEA055 – Estatística e Probabilidade</a:t>
-            </a:r>
-            <a:br>
-              <a:rPr lang="pt-BR" dirty="0">
-                <a:latin typeface="AlternateGothic2 BT" panose="020B0608020202050204" pitchFamily="34" charset="0"/>
-              </a:rPr>
-            </a:br>
-            <a:r>
-              <a:rPr lang="pt-BR" sz="1700" b="1" dirty="0"/>
-              <a:t>Intervalo de Confiança para a Média</a:t>
-            </a:r>
-            <a:endParaRPr lang="pt-BR" dirty="0">
-              <a:latin typeface="AlternateGothic2 BT" panose="020B0608020202050204" pitchFamily="34" charset="0"/>
-            </a:endParaRPr>
-          </a:p>
-        </p:txBody>
-      </p:sp>
-      <p:sp>
-        <p:nvSpPr>
           <p:cNvPr id="6" name="Caixa"/>
           <p:cNvSpPr txBox="1"/>
           <p:nvPr/>
@@ -6392,7 +5600,7 @@
         <p:spPr>
           <a:xfrm>
             <a:off x="361395" y="6488668"/>
-            <a:ext cx="2395336" cy="300210"/>
+            <a:ext cx="7620000" cy="300210"/>
           </a:xfrm>
           <a:prstGeom prst="rect">
             <a:avLst/>
@@ -6407,35 +5615,11 @@
           <a:p>
             <a:r>
               <a:rPr lang="pt-BR" sz="1351" dirty="0"/>
-              <a:t>Professor: Marcos Goulart Lima</a:t>
-            </a:r>
-          </a:p>
-        </p:txBody>
-      </p:sp>
-      <p:pic>
-        <p:nvPicPr>
-          <p:cNvPr id="8" name="Logo UFOP"/>
-          <p:cNvPicPr>
-            <a:picLocks noChangeAspect="1"/>
-          </p:cNvPicPr>
-          <p:nvPr/>
-        </p:nvPicPr>
-        <p:blipFill>
-          <a:blip r:embed="rId3"/>
-          <a:stretch>
-            <a:fillRect/>
-          </a:stretch>
-        </p:blipFill>
-        <p:spPr>
-          <a:xfrm>
-            <a:off x="62144" y="112237"/>
-            <a:ext cx="588096" cy="1228523"/>
-          </a:xfrm>
-          <a:prstGeom prst="rect">
-            <a:avLst/>
-          </a:prstGeom>
-        </p:spPr>
-      </p:pic>
+              <a:t>CEA055 - Estatística e Probabilidade - Professor: Marcos Goulart Lima</a:t>
+            </a:r>
+          </a:p>
+        </p:txBody>
+      </p:sp>
     </p:spTree>
   </p:cSld>
   <p:clrMapOvr>
@@ -6463,50 +5647,6 @@
       </p:grpSpPr>
       <p:sp>
         <p:nvSpPr>
-          <p:cNvPr id="2" name="Título 1"/>
-          <p:cNvSpPr>
-            <a:spLocks noGrp="1"/>
-          </p:cNvSpPr>
-          <p:nvPr>
-            <p:ph type="title"/>
-          </p:nvPr>
-        </p:nvSpPr>
-        <p:spPr>
-          <a:xfrm>
-            <a:off x="1032611" y="0"/>
-            <a:ext cx="10827959" cy="900000"/>
-          </a:xfrm>
-        </p:spPr>
-        <p:txBody>
-          <a:bodyPr>
-            <a:normAutofit/>
-          </a:bodyPr>
-          <a:lstStyle/>
-          <a:p>
-            <a:pPr algn="ctr"/>
-            <a:r>
-              <a:rPr lang="pt-BR" dirty="0">
-                <a:latin typeface="AlternateGothic2 BT" panose="020B0608020202050204" pitchFamily="34" charset="0"/>
-              </a:rPr>
-              <a:t>CEA055 – Estatística e Probabilidade</a:t>
-            </a:r>
-            <a:br>
-              <a:rPr lang="pt-BR" dirty="0">
-                <a:latin typeface="AlternateGothic2 BT" panose="020B0608020202050204" pitchFamily="34" charset="0"/>
-              </a:rPr>
-            </a:br>
-            <a:r>
-              <a:rPr lang="pt-BR" sz="1700" b="1" dirty="0"/>
-              <a:t>Intervalo de Confiança para a Média</a:t>
-            </a:r>
-            <a:endParaRPr lang="pt-BR" dirty="0">
-              <a:latin typeface="AlternateGothic2 BT" panose="020B0608020202050204" pitchFamily="34" charset="0"/>
-            </a:endParaRPr>
-          </a:p>
-        </p:txBody>
-      </p:sp>
-      <p:sp>
-        <p:nvSpPr>
           <p:cNvPr id="6" name="Caixa"/>
           <p:cNvSpPr txBox="1"/>
           <p:nvPr/>
@@ -6607,7 +5747,7 @@
         <p:spPr>
           <a:xfrm>
             <a:off x="361395" y="6488668"/>
-            <a:ext cx="2395336" cy="300210"/>
+            <a:ext cx="7620000" cy="300210"/>
           </a:xfrm>
           <a:prstGeom prst="rect">
             <a:avLst/>
@@ -6622,35 +5762,11 @@
           <a:p>
             <a:r>
               <a:rPr lang="pt-BR" sz="1351" dirty="0"/>
-              <a:t>Professor: Marcos Goulart Lima</a:t>
-            </a:r>
-          </a:p>
-        </p:txBody>
-      </p:sp>
-      <p:pic>
-        <p:nvPicPr>
-          <p:cNvPr id="8" name="Logo UFOP"/>
-          <p:cNvPicPr>
-            <a:picLocks noChangeAspect="1"/>
-          </p:cNvPicPr>
-          <p:nvPr/>
-        </p:nvPicPr>
-        <p:blipFill>
-          <a:blip r:embed="rId3"/>
-          <a:stretch>
-            <a:fillRect/>
-          </a:stretch>
-        </p:blipFill>
-        <p:spPr>
-          <a:xfrm>
-            <a:off x="62144" y="112237"/>
-            <a:ext cx="588096" cy="1228523"/>
-          </a:xfrm>
-          <a:prstGeom prst="rect">
-            <a:avLst/>
-          </a:prstGeom>
-        </p:spPr>
-      </p:pic>
+              <a:t>CEA055 - Estatística e Probabilidade - Professor: Marcos Goulart Lima</a:t>
+            </a:r>
+          </a:p>
+        </p:txBody>
+      </p:sp>
     </p:spTree>
   </p:cSld>
   <p:clrMapOvr>
@@ -6678,50 +5794,6 @@
       </p:grpSpPr>
       <p:sp>
         <p:nvSpPr>
-          <p:cNvPr id="2" name="Título 1"/>
-          <p:cNvSpPr>
-            <a:spLocks noGrp="1"/>
-          </p:cNvSpPr>
-          <p:nvPr>
-            <p:ph type="title"/>
-          </p:nvPr>
-        </p:nvSpPr>
-        <p:spPr>
-          <a:xfrm>
-            <a:off x="1032611" y="0"/>
-            <a:ext cx="10827959" cy="900000"/>
-          </a:xfrm>
-        </p:spPr>
-        <p:txBody>
-          <a:bodyPr>
-            <a:normAutofit/>
-          </a:bodyPr>
-          <a:lstStyle/>
-          <a:p>
-            <a:pPr algn="ctr"/>
-            <a:r>
-              <a:rPr lang="pt-BR" dirty="0">
-                <a:latin typeface="AlternateGothic2 BT" panose="020B0608020202050204" pitchFamily="34" charset="0"/>
-              </a:rPr>
-              <a:t>CEA055 – Estatística e Probabilidade</a:t>
-            </a:r>
-            <a:br>
-              <a:rPr lang="pt-BR" dirty="0">
-                <a:latin typeface="AlternateGothic2 BT" panose="020B0608020202050204" pitchFamily="34" charset="0"/>
-              </a:rPr>
-            </a:br>
-            <a:r>
-              <a:rPr lang="pt-BR" sz="1700" b="1" dirty="0"/>
-              <a:t>Intervalo de Confiança para a Média</a:t>
-            </a:r>
-            <a:endParaRPr lang="pt-BR" dirty="0">
-              <a:latin typeface="AlternateGothic2 BT" panose="020B0608020202050204" pitchFamily="34" charset="0"/>
-            </a:endParaRPr>
-          </a:p>
-        </p:txBody>
-      </p:sp>
-      <p:sp>
-        <p:nvSpPr>
           <p:cNvPr id="6" name="Caixa"/>
           <p:cNvSpPr txBox="1"/>
           <p:nvPr/>
@@ -6776,7 +5848,7 @@
         <p:spPr>
           <a:xfrm>
             <a:off x="361395" y="6488668"/>
-            <a:ext cx="2395336" cy="300210"/>
+            <a:ext cx="7620000" cy="300210"/>
           </a:xfrm>
           <a:prstGeom prst="rect">
             <a:avLst/>
@@ -6791,35 +5863,11 @@
           <a:p>
             <a:r>
               <a:rPr lang="pt-BR" sz="1351" dirty="0"/>
-              <a:t>Professor: Marcos Goulart Lima</a:t>
-            </a:r>
-          </a:p>
-        </p:txBody>
-      </p:sp>
-      <p:pic>
-        <p:nvPicPr>
-          <p:cNvPr id="8" name="Logo UFOP"/>
-          <p:cNvPicPr>
-            <a:picLocks noChangeAspect="1"/>
-          </p:cNvPicPr>
-          <p:nvPr/>
-        </p:nvPicPr>
-        <p:blipFill>
-          <a:blip r:embed="rId2"/>
-          <a:stretch>
-            <a:fillRect/>
-          </a:stretch>
-        </p:blipFill>
-        <p:spPr>
-          <a:xfrm>
-            <a:off x="62144" y="112237"/>
-            <a:ext cx="588096" cy="1228523"/>
-          </a:xfrm>
-          <a:prstGeom prst="rect">
-            <a:avLst/>
-          </a:prstGeom>
-        </p:spPr>
-      </p:pic>
+              <a:t>CEA055 - Estatística e Probabilidade - Professor: Marcos Goulart Lima</a:t>
+            </a:r>
+          </a:p>
+        </p:txBody>
+      </p:sp>
     </p:spTree>
   </p:cSld>
   <p:clrMapOvr>
